--- a/PPTs/Ch8_ARM_Subroutines_Exercises ANS.pptx
+++ b/PPTs/Ch8_ARM_Subroutines_Exercises ANS.pptx
@@ -2264,6 +2264,13 @@
             </a:br>
             <a:r>
               <a:rPr lang="en-US" sz="1200" dirty="0"/>
+              <a:t>    ITE     LT            ; IT block (Cortex-M)</a:t>
+            </a:r>
+            <a:br>
+              <a:rPr lang="en-US" sz="1200" dirty="0"/>
+            </a:br>
+            <a:r>
+              <a:rPr lang="en-US" sz="1200" dirty="0"/>
               <a:t>    MOVLT   r0, #0        ; if (</a:t>
             </a:r>
             <a:r>
@@ -2497,7 +2504,7 @@
                 <a:ea typeface="+mn-ea"/>
                 <a:cs typeface="+mn-cs"/>
               </a:rPr>
-              <a:t>For Thumb-2, prefer conditional branches or the IT block variant if permitted by assembler; for classic ARM state, full conditional MOVs avoid branches.</a:t>
+              <a:t>On Cortex-M (Thumb-2) a conditional non-branch instruction such as MOVLT/MOVGE must be inside an IT block (ITE LT, ITE MI shown above; "E" slot uses the inverse condition); Cortex-M0/M0+ has no IT, so use the conditional-branch versions. In classic ARM state (A32) the full conditional MOVs work without IT.</a:t>
             </a:r>
           </a:p>
           <a:p>
@@ -10416,7 +10423,7 @@
           <a:p>
             <a:r>
               <a:rPr lang="en-US" dirty="0"/>
-              <a:t>Fall 2025</a:t>
+              <a:t>Fall 2026</a:t>
             </a:r>
           </a:p>
         </p:txBody>
@@ -13771,7 +13778,7 @@
                 <a:ea typeface="+mn-ea"/>
                 <a:cs typeface="Consolas" panose="020B0609020204030204" pitchFamily="49" charset="0"/>
               </a:rPr>
-              <a:t>PUSH (R1, R3)</a:t>
+              <a:t>PUSH {R1, R3}</a:t>
             </a:r>
           </a:p>
           <a:p>
@@ -13807,7 +13814,7 @@
                 <a:ea typeface="+mn-ea"/>
                 <a:cs typeface="Consolas" panose="020B0609020204030204" pitchFamily="49" charset="0"/>
               </a:rPr>
-              <a:t>POP (R5)</a:t>
+              <a:t>POP {R5}</a:t>
             </a:r>
           </a:p>
         </p:txBody>
@@ -15928,7 +15935,7 @@
                           <a:ea typeface="+mn-ea"/>
                           <a:cs typeface="+mn-cs"/>
                         </a:rPr>
-                        <a:t>0x10000200</a:t>
+                        <a:t>0x100001FC</a:t>
                       </a:r>
                       <a:endParaRPr kumimoji="0" lang="en-US" b="0" kern="1200" dirty="0">
                         <a:solidFill>
@@ -16410,7 +16417,7 @@
                 <a:ea typeface="+mn-ea"/>
                 <a:cs typeface="Consolas" panose="020B0609020204030204" pitchFamily="49" charset="0"/>
               </a:rPr>
-              <a:t>PUSH (R1, R3)</a:t>
+              <a:t>PUSH {R1, R3}</a:t>
             </a:r>
           </a:p>
           <a:p>
@@ -16446,7 +16453,7 @@
                 <a:ea typeface="+mn-ea"/>
                 <a:cs typeface="Consolas" panose="020B0609020204030204" pitchFamily="49" charset="0"/>
               </a:rPr>
-              <a:t>POP (R5)</a:t>
+              <a:t>POP {R5}</a:t>
             </a:r>
           </a:p>
         </p:txBody>
@@ -17326,7 +17333,7 @@
           <a:p>
             <a:r>
               <a:rPr lang="en-US" dirty="0"/>
-              <a:t>Register </a:t>
+              <a:t>Register R1:R0</a:t>
             </a:r>
             <a:r>
               <a:rPr lang="en-US" b="1" dirty="0">
@@ -17335,7 +17342,7 @@
                 </a:solidFill>
                 <a:latin typeface="Consolas" panose="020B0609020204030204" pitchFamily="49" charset="0"/>
               </a:rPr>
-              <a:t>R0</a:t>
+              <a:t/>
             </a:r>
           </a:p>
         </p:txBody>
@@ -18311,7 +18318,7 @@
           <a:p>
             <a:r>
               <a:rPr lang="en-US" dirty="0"/>
-              <a:t>Register </a:t>
+              <a:t>Register R1:R0</a:t>
             </a:r>
             <a:r>
               <a:rPr lang="en-US" b="1" dirty="0">
@@ -18320,7 +18327,7 @@
                 </a:solidFill>
                 <a:latin typeface="Consolas" panose="020B0609020204030204" pitchFamily="49" charset="0"/>
               </a:rPr>
-              <a:t>R0</a:t>
+              <a:t/>
             </a:r>
           </a:p>
         </p:txBody>
@@ -18428,7 +18435,7 @@
                   <a:srgbClr val="FF0000"/>
                 </a:solidFill>
               </a:rPr>
-              <a:t>Callee pops d16 from stack</a:t>
+              <a:t>Callee reads d16 from stack</a:t>
             </a:r>
           </a:p>
         </p:txBody>
@@ -19069,7 +19076,7 @@
           <a:p>
             <a:r>
               <a:rPr lang="en-US" dirty="0"/>
-              <a:t>Each argument of 8-bit char, or 16-bit short, is passed in one 32-bit register; cannot use 1 register to pass more than 1 arguments</a:t>
+              <a:t>Each argument of 8-bit char, or 16-bit short, is passed in one 32-bit register; cannot use 1 register to pass more than one argument</a:t>
             </a:r>
           </a:p>
           <a:p>
@@ -19104,7 +19111,7 @@
             <a:pPr lvl="1"/>
             <a:r>
               <a:rPr lang="en-US" dirty="0"/>
-              <a:t>a5 (char) on the stack.</a:t>
+              <a:t>a5 (char) on the stack. The result (long, 32 bits) is returned in R0.</a:t>
             </a:r>
           </a:p>
           <a:p>
@@ -20373,7 +20380,7 @@
                 </a:solidFill>
                 <a:latin typeface="Consolas" panose="020B0609020204030204" pitchFamily="49" charset="0"/>
               </a:rPr>
-              <a:t>POP {r0}</a:t>
+              <a:t>ADD sp, sp, #4</a:t>
             </a:r>
           </a:p>
         </p:txBody>
@@ -20860,7 +20867,7 @@
                           <a:latin typeface="Consolas" panose="020B0609020204030204" pitchFamily="49" charset="0"/>
                           <a:cs typeface="Consolas" panose="020B0609020204030204" pitchFamily="49" charset="0"/>
                         </a:rPr>
-                        <a:t>Extern</a:t>
+                        <a:t>extern int32_t</a:t>
                       </a:r>
                       <a:r>
                         <a:rPr lang="fr-FR" sz="1400" dirty="0">
@@ -20868,7 +20875,7 @@
                           <a:latin typeface="Consolas" panose="020B0609020204030204" pitchFamily="49" charset="0"/>
                           <a:cs typeface="Consolas" panose="020B0609020204030204" pitchFamily="49" charset="0"/>
                         </a:rPr>
-                        <a:t> int32_t sum3(int32_t a1, int32_t a2, int32_t a3);</a:t>
+                        <a:t> sum3(int32_t a1, int32_t a2, int32_t a3);</a:t>
                       </a:r>
                     </a:p>
                     <a:p>
@@ -20943,7 +20950,7 @@
                           <a:latin typeface="Consolas" panose="020B0609020204030204" pitchFamily="49" charset="0"/>
                           <a:cs typeface="Consolas" panose="020B0609020204030204" pitchFamily="49" charset="0"/>
                         </a:rPr>
-                        <a:t>int32_t s</a:t>
+                        <a:t>int32_t s;</a:t>
                       </a:r>
                     </a:p>
                     <a:p>
@@ -21903,7 +21910,7 @@
                 </a:solidFill>
                 <a:latin typeface="Gill Sans MT"/>
               </a:rPr>
-              <a:t>is stored last</a:t>
+              <a:t>r1 is stored last</a:t>
             </a:r>
             <a:r>
               <a:rPr lang="en-US" sz="1500" dirty="0">
@@ -22171,7 +22178,7 @@
           <a:p>
             <a:r>
               <a:rPr lang="en-US" dirty="0"/>
-              <a:t>Return result should be put into r0, not r1</a:t>
+              <a:t>Return result should be put into r0, not r1; also ADD r3, r3, r2 (not r0)</a:t>
             </a:r>
           </a:p>
           <a:p>
@@ -22297,7 +22304,7 @@
                           <a:latin typeface="Consolas" panose="020B0609020204030204" pitchFamily="49" charset="0"/>
                           <a:cs typeface="Consolas" panose="020B0609020204030204" pitchFamily="49" charset="0"/>
                         </a:rPr>
-                        <a:t>Extern</a:t>
+                        <a:t>extern int32_t</a:t>
                       </a:r>
                       <a:r>
                         <a:rPr lang="fr-FR" sz="1400" dirty="0">
@@ -22305,7 +22312,7 @@
                           <a:latin typeface="Consolas" panose="020B0609020204030204" pitchFamily="49" charset="0"/>
                           <a:cs typeface="Consolas" panose="020B0609020204030204" pitchFamily="49" charset="0"/>
                         </a:rPr>
-                        <a:t> int32_t sum3(int32_t a1, int32_t a2, int32_t a3);</a:t>
+                        <a:t> sum3(int32_t a1, int32_t a2, int32_t a3);</a:t>
                       </a:r>
                     </a:p>
                     <a:p>
@@ -22380,7 +22387,7 @@
                           <a:latin typeface="Consolas" panose="020B0609020204030204" pitchFamily="49" charset="0"/>
                           <a:cs typeface="Consolas" panose="020B0609020204030204" pitchFamily="49" charset="0"/>
                         </a:rPr>
-                        <a:t>int32_t s</a:t>
+                        <a:t>int32_t s;</a:t>
                       </a:r>
                     </a:p>
                     <a:p>
@@ -22665,7 +22672,7 @@
                           <a:latin typeface="Consolas" panose="020B0609020204030204" pitchFamily="49" charset="0"/>
                           <a:cs typeface="Consolas" panose="020B0609020204030204" pitchFamily="49" charset="0"/>
                         </a:rPr>
-                        <a:t>ADD r3, r0, r2 ; sum += a3</a:t>
+                        <a:t>ADD r3, r3, r2 ; sum += a3</a:t>
                       </a:r>
                     </a:p>
                     <a:p>
@@ -23706,7 +23713,7 @@
                           <a:ea typeface="+mn-ea"/>
                           <a:cs typeface="+mn-cs"/>
                         </a:rPr>
-                        <a:t>extern</a:t>
+                        <a:t>extern int toLower(int); /* assembler routine */</a:t>
                       </a:r>
                       <a:r>
                         <a:rPr kumimoji="0" lang="en-US" sz="1400" b="0" i="0" kern="1200" dirty="0">
@@ -23718,7 +23725,7 @@
                           <a:ea typeface="+mn-ea"/>
                           <a:cs typeface="+mn-cs"/>
                         </a:rPr>
-                        <a:t> </a:t>
+                        <a:t/>
                       </a:r>
                       <a:r>
                         <a:rPr kumimoji="0" lang="en-US" sz="1400" b="1" i="0" kern="1200" dirty="0">
@@ -23730,7 +23737,7 @@
                           <a:ea typeface="+mn-ea"/>
                           <a:cs typeface="+mn-cs"/>
                         </a:rPr>
-                        <a:t>int</a:t>
+                        <a:t/>
                       </a:r>
                       <a:r>
                         <a:rPr kumimoji="0" lang="en-US" sz="1400" b="0" i="0" kern="1200" dirty="0">
@@ -23742,7 +23749,7 @@
                           <a:ea typeface="+mn-ea"/>
                           <a:cs typeface="+mn-cs"/>
                         </a:rPr>
-                        <a:t> mystery(</a:t>
+                        <a:t/>
                       </a:r>
                       <a:r>
                         <a:rPr kumimoji="0" lang="en-US" sz="1400" b="1" i="0" kern="1200" dirty="0">
@@ -23754,7 +23761,7 @@
                           <a:ea typeface="+mn-ea"/>
                           <a:cs typeface="+mn-cs"/>
                         </a:rPr>
-                        <a:t>int</a:t>
+                        <a:t/>
                       </a:r>
                       <a:r>
                         <a:rPr kumimoji="0" lang="en-US" sz="1400" b="0" i="0" kern="1200" dirty="0">
@@ -23766,7 +23773,7 @@
                           <a:ea typeface="+mn-ea"/>
                           <a:cs typeface="+mn-cs"/>
                         </a:rPr>
-                        <a:t>); </a:t>
+                        <a:t/>
                       </a:r>
                       <a:r>
                         <a:rPr kumimoji="0" lang="en-US" sz="1400" b="0" i="1" kern="1200" dirty="0">
@@ -23778,7 +23785,7 @@
                           <a:ea typeface="+mn-ea"/>
                           <a:cs typeface="+mn-cs"/>
                         </a:rPr>
-                        <a:t>/* mystery assembler routine */</a:t>
+                        <a:t/>
                       </a:r>
                       <a:endParaRPr kumimoji="0" lang="en-US" sz="1400" b="0" i="0" kern="1200" dirty="0">
                         <a:solidFill>
@@ -27038,14 +27045,14 @@
           <a:p>
             <a:r>
               <a:rPr lang="en-US" dirty="0"/>
-              <a:t>1. CMP R0, R1 (0x858/0x258)</a:t>
+              <a:t>1. CMP R0, R1 (0x258)</a:t>
             </a:r>
           </a:p>
           <a:p>
             <a:pPr lvl="1"/>
             <a:r>
               <a:rPr lang="en-US" dirty="0"/>
-              <a:t>Performs: 8 - 10</a:t>
+              <a:t>Performs: 5 - 10 = -5</a:t>
             </a:r>
           </a:p>
           <a:p>
@@ -28299,7 +28306,7 @@
                 </a:solidFill>
                 <a:latin typeface="Gill Sans MT"/>
               </a:rPr>
-              <a:t>is loaded first</a:t>
+              <a:t>r1 is loaded first</a:t>
             </a:r>
             <a:r>
               <a:rPr lang="en-US" sz="1500" dirty="0">
@@ -28633,57 +28640,64 @@
                     <a:lstStyle/>
                     <a:p>
                       <a:r>
-                        <a:rPr lang="en-US" sz="1400" dirty="0"/>
+                        <a:rPr lang="en-US" sz="1200" dirty="0"/>
                         <a:t>foo:</a:t>
                       </a:r>
                       <a:br>
-                        <a:rPr lang="en-US" sz="1400" dirty="0"/>
+                        <a:rPr lang="en-US" sz="1200" dirty="0"/>
                       </a:br>
                       <a:r>
-                        <a:rPr lang="en-US" sz="1400" dirty="0"/>
+                        <a:rPr lang="en-US" sz="1200" dirty="0"/>
                         <a:t>    ADD     r2, r0, r1      ; r2 = x + y</a:t>
                       </a:r>
                       <a:br>
-                        <a:rPr lang="en-US" sz="1400" dirty="0"/>
+                        <a:rPr lang="en-US" sz="1200" dirty="0"/>
                       </a:br>
                       <a:r>
-                        <a:rPr lang="en-US" sz="1400" dirty="0"/>
+                        <a:rPr lang="en-US" sz="1200" dirty="0"/>
                         <a:t>    CMP     r2, #0          ; sets N,Z,V,C for signed compare to 0</a:t>
                       </a:r>
                       <a:br>
-                        <a:rPr lang="en-US" sz="1400" dirty="0"/>
+                        <a:rPr lang="en-US" sz="1200" dirty="0"/>
                       </a:br>
                       <a:r>
-                        <a:rPr lang="en-US" sz="1400" dirty="0"/>
+                        <a:rPr lang="en-US" sz="1200" dirty="0"/>
+                        <a:t>    ITE     LT            ; IT block (Cortex-M)</a:t>
+                      </a:r>
+                      <a:br>
+                        <a:rPr lang="en-US" sz="1200" dirty="0"/>
+                      </a:br>
+                      <a:r>
+                        <a:rPr lang="en-US" sz="1200" dirty="0"/>
                         <a:t>    MOVLT   r0, #0        ; if (</a:t>
                       </a:r>
                       <a:r>
-                        <a:rPr lang="en-US" sz="1400" dirty="0" err="1"/>
+                        <a:rPr lang="en-US" sz="1200" dirty="0" err="1"/>
                         <a:t>x+y</a:t>
                       </a:r>
                       <a:r>
-                        <a:rPr lang="en-US" sz="1400" dirty="0"/>
+                        <a:rPr lang="en-US" sz="1200" dirty="0"/>
                         <a:t>) &lt; 0 -&gt; r0 = 0</a:t>
                       </a:r>
                       <a:br>
-                        <a:rPr lang="en-US" sz="1400" dirty="0"/>
+                        <a:rPr lang="en-US" sz="1200" dirty="0"/>
                       </a:br>
                       <a:r>
-                        <a:rPr lang="en-US" sz="1400" dirty="0"/>
+                        <a:rPr lang="en-US" sz="1200" dirty="0"/>
                         <a:t>    MOVGE   r0, #1       ; else r0 = 1</a:t>
                       </a:r>
                       <a:br>
-                        <a:rPr lang="en-US" sz="1400" dirty="0"/>
+                        <a:rPr lang="en-US" sz="1200" dirty="0"/>
                       </a:br>
                       <a:r>
-                        <a:rPr lang="en-US" sz="1400" dirty="0"/>
+                        <a:rPr lang="en-US" sz="1200" dirty="0"/>
                         <a:t>    BX      </a:t>
                       </a:r>
                       <a:r>
-                        <a:rPr lang="en-US" sz="1400" dirty="0" err="1"/>
+                        <a:rPr lang="en-US" sz="1200" dirty="0" err="1"/>
                         <a:t>lr</a:t>
                       </a:r>
-                      <a:endParaRPr lang="en-US" sz="1400" dirty="0"/>
+                      <a:endParaRPr lang="en-US" sz="1200" dirty="0"/>
                     </a:p>
                   </a:txBody>
                   <a:tcPr marL="68580" marR="68580" marT="0" marB="0"/>
@@ -28981,42 +28995,49 @@
                         <a:defRPr/>
                       </a:pPr>
                       <a:r>
-                        <a:rPr lang="en-US" sz="1400" dirty="0"/>
+                        <a:rPr lang="en-US" sz="1200" dirty="0"/>
                         <a:t>foo:</a:t>
                       </a:r>
                       <a:br>
-                        <a:rPr lang="en-US" sz="1400" dirty="0"/>
+                        <a:rPr lang="en-US" sz="1200" dirty="0"/>
                       </a:br>
                       <a:r>
-                        <a:rPr lang="en-US" sz="1400" dirty="0"/>
-                        <a:t>    ADDS    r2, r0, r1         ; r2 = x + y, sets flags from the sum</a:t>
+                        <a:rPr lang="en-US" sz="1200" dirty="0"/>
+                        <a:t>    ADDS    r2, r0, r1   ; r2 = x + y, sets flags</a:t>
                       </a:r>
                       <a:br>
-                        <a:rPr lang="en-US" sz="1400" dirty="0"/>
+                        <a:rPr lang="en-US" sz="1200" dirty="0"/>
                       </a:br>
                       <a:r>
-                        <a:rPr lang="en-US" sz="1400" dirty="0"/>
-                        <a:t>    MOVMI   r0, #0             ; MI means N=1 (negative)</a:t>
+                        <a:rPr lang="en-US" sz="1200" dirty="0"/>
+                        <a:t>    ITE     MI           ; IT block (Cortex-M)</a:t>
                       </a:r>
                       <a:br>
-                        <a:rPr lang="en-US" sz="1400" dirty="0"/>
+                        <a:rPr lang="en-US" sz="1200" dirty="0"/>
                       </a:br>
                       <a:r>
-                        <a:rPr lang="en-US" sz="1400" dirty="0"/>
-                        <a:t>    MOVPL   r0, #1             ; PL means N=0 (non-negative)</a:t>
+                        <a:rPr lang="en-US" sz="1200" dirty="0"/>
+                        <a:t>    MOVMI   r0, #0       ; MI means N=1 (negative)</a:t>
                       </a:r>
                       <a:br>
-                        <a:rPr lang="en-US" sz="1400" dirty="0"/>
+                        <a:rPr lang="en-US" sz="1200" dirty="0"/>
                       </a:br>
                       <a:r>
-                        <a:rPr lang="en-US" sz="1400" dirty="0"/>
+                        <a:rPr lang="en-US" sz="1200" dirty="0"/>
+                        <a:t>    MOVPL   r0, #1       ; PL means N=0 (non-neg.)</a:t>
+                      </a:r>
+                      <a:br>
+                        <a:rPr lang="en-US" sz="1200" dirty="0"/>
+                      </a:br>
+                      <a:r>
+                        <a:rPr lang="en-US" sz="1200" dirty="0"/>
                         <a:t>    BX      </a:t>
                       </a:r>
                       <a:r>
-                        <a:rPr lang="en-US" sz="1400" dirty="0" err="1"/>
+                        <a:rPr lang="en-US" sz="1200" dirty="0" err="1"/>
                         <a:t>lr</a:t>
                       </a:r>
-                      <a:endParaRPr lang="en-US" sz="1400" dirty="0"/>
+                      <a:endParaRPr lang="en-US" sz="1200" dirty="0"/>
                     </a:p>
                   </a:txBody>
                   <a:tcPr marL="68580" marR="68580" marT="0" marB="0"/>
@@ -29126,42 +29147,49 @@
                     <a:lstStyle/>
                     <a:p>
                       <a:r>
-                        <a:rPr lang="en-US" sz="1400" dirty="0"/>
+                        <a:rPr lang="en-US" sz="1200" dirty="0"/>
                         <a:t>foo:</a:t>
                       </a:r>
                       <a:br>
-                        <a:rPr lang="en-US" sz="1400" dirty="0"/>
+                        <a:rPr lang="en-US" sz="1200" dirty="0"/>
                       </a:br>
                       <a:r>
-                        <a:rPr lang="en-US" sz="1400" dirty="0"/>
+                        <a:rPr lang="en-US" sz="1200" dirty="0"/>
                         <a:t>    ADDS    r0, r0, r1          ; r0 = x + y, flags set</a:t>
                       </a:r>
                       <a:br>
-                        <a:rPr lang="en-US" sz="1400" dirty="0"/>
+                        <a:rPr lang="en-US" sz="1200" dirty="0"/>
                       </a:br>
                       <a:r>
-                        <a:rPr lang="en-US" sz="1400" dirty="0"/>
+                        <a:rPr lang="en-US" sz="1200" dirty="0"/>
+                        <a:t>    ITE     MI</a:t>
+                      </a:r>
+                      <a:br>
+                        <a:rPr lang="en-US" sz="1200" dirty="0"/>
+                      </a:br>
+                      <a:r>
+                        <a:rPr lang="en-US" sz="1200" dirty="0"/>
                         <a:t>    MOVMI   r0, #0</a:t>
                       </a:r>
                       <a:br>
-                        <a:rPr lang="en-US" sz="1400" dirty="0"/>
+                        <a:rPr lang="en-US" sz="1200" dirty="0"/>
                       </a:br>
                       <a:r>
-                        <a:rPr lang="en-US" sz="1400" dirty="0"/>
+                        <a:rPr lang="en-US" sz="1200" dirty="0"/>
                         <a:t>    MOVPL   r0, #1</a:t>
                       </a:r>
                       <a:br>
-                        <a:rPr lang="en-US" sz="1400" dirty="0"/>
+                        <a:rPr lang="en-US" sz="1200" dirty="0"/>
                       </a:br>
                       <a:r>
-                        <a:rPr lang="en-US" sz="1400" dirty="0"/>
+                        <a:rPr lang="en-US" sz="1200" dirty="0"/>
                         <a:t>    BX      </a:t>
                       </a:r>
                       <a:r>
-                        <a:rPr lang="en-US" sz="1400" dirty="0" err="1"/>
+                        <a:rPr lang="en-US" sz="1200" dirty="0" err="1"/>
                         <a:t>lr</a:t>
                       </a:r>
-                      <a:endParaRPr lang="en-US" sz="1400" dirty="0"/>
+                      <a:endParaRPr lang="en-US" sz="1200" dirty="0"/>
                     </a:p>
                   </a:txBody>
                   <a:tcPr marL="68580" marR="68580" marT="0" marB="0"/>
@@ -30300,7 +30328,7 @@
             </a:pPr>
             <a:r>
               <a:rPr lang="en-US" dirty="0"/>
-              <a:t>% uint32_t </a:t>
+              <a:t>@ uint32_t </a:t>
             </a:r>
             <a:r>
               <a:rPr lang="en-US" dirty="0" err="1"/>
@@ -30317,7 +30345,7 @@
             </a:pPr>
             <a:r>
               <a:rPr lang="en-US" dirty="0"/>
-              <a:t>% r0 = n, returns r0 = n!</a:t>
+              <a:t>@ r0 = n, returns r0 = n!</a:t>
             </a:r>
           </a:p>
           <a:p>
@@ -30361,7 +30389,7 @@
             </a:r>
             <a:r>
               <a:rPr lang="en-US" dirty="0"/>
-              <a:t>}        % save callee-saved we’ll use and return </a:t>
+              <a:t>}        @ save callee-saved we’ll use and return </a:t>
             </a:r>
             <a:r>
               <a:rPr lang="en-US" dirty="0" err="1"/>
@@ -30375,7 +30403,7 @@
             </a:pPr>
             <a:r>
               <a:rPr lang="en-US" dirty="0"/>
-              <a:t>    MOV    r1, r0          % r1 = n (loop counter)</a:t>
+              <a:t>    MOV    r1, r0          @ r1 = n (loop counter)</a:t>
             </a:r>
           </a:p>
           <a:p>
@@ -30384,7 +30412,7 @@
             </a:pPr>
             <a:r>
               <a:rPr lang="en-US" dirty="0"/>
-              <a:t>    MOV    r0, #1         % r0 = acc = 1</a:t>
+              <a:t>    MOV    r0, #1         @ r0 = acc = 1</a:t>
             </a:r>
           </a:p>
           <a:p>
@@ -30410,7 +30438,7 @@
             </a:r>
             <a:r>
               <a:rPr lang="en-US" dirty="0"/>
-              <a:t>       % if n &lt;= 1, return 1</a:t>
+              <a:t>       @ if n &lt;= 1, return 1</a:t>
             </a:r>
           </a:p>
           <a:p>
@@ -30419,7 +30447,7 @@
             </a:pPr>
             <a:r>
               <a:rPr lang="en-US" dirty="0"/>
-              <a:t>                                      %(unsigned compare)</a:t>
+              <a:t>                                      @(unsigned compare)</a:t>
             </a:r>
           </a:p>
           <a:p>
@@ -30445,7 +30473,7 @@
             </a:pPr>
             <a:r>
               <a:rPr lang="en-US" dirty="0"/>
-              <a:t>    % TODO</a:t>
+              <a:t>    @ TODO</a:t>
             </a:r>
           </a:p>
           <a:p>
@@ -30719,7 +30747,7 @@
             </a:pPr>
             <a:r>
               <a:rPr lang="en-US" dirty="0"/>
-              <a:t>% uint32_t factorial(uint32_t n); Recursive version</a:t>
+              <a:t>@ uint32_t factorial(uint32_t n); Recursive version</a:t>
             </a:r>
           </a:p>
           <a:p>
@@ -30728,7 +30756,7 @@
             </a:pPr>
             <a:r>
               <a:rPr lang="en-US" dirty="0"/>
-              <a:t>% r0: n</a:t>
+              <a:t>@ r0: n</a:t>
             </a:r>
           </a:p>
           <a:p>
@@ -30737,7 +30765,7 @@
             </a:pPr>
             <a:r>
               <a:rPr lang="en-US" dirty="0"/>
-              <a:t>% returns r0: n!</a:t>
+              <a:t>@ returns r0: n!</a:t>
             </a:r>
           </a:p>
           <a:p>
@@ -30761,7 +30789,7 @@
             </a:pPr>
             <a:r>
               <a:rPr lang="en-US" dirty="0"/>
-              <a:t>    CMP     r0, #1            % if (n &lt;= 1) ...</a:t>
+              <a:t>    CMP     r0, #1            @ if (n &lt;= 1) ...</a:t>
             </a:r>
           </a:p>
           <a:p>
@@ -30778,7 +30806,7 @@
             </a:r>
             <a:r>
               <a:rPr lang="en-US" dirty="0"/>
-              <a:t>         %    ... return 1</a:t>
+              <a:t>         @    ... return 1</a:t>
             </a:r>
           </a:p>
           <a:p>
@@ -30801,7 +30829,7 @@
             </a:r>
             <a:r>
               <a:rPr lang="en-US" dirty="0"/>
-              <a:t>}              % save return address for this frame</a:t>
+              <a:t>}              @ save return address for this frame</a:t>
             </a:r>
           </a:p>
           <a:p>
@@ -30810,7 +30838,7 @@
             </a:pPr>
             <a:r>
               <a:rPr lang="en-US" dirty="0"/>
-              <a:t>    PUSH    {r0}              % save current n on stack (we'll need it after the recursive call)</a:t>
+              <a:t>    PUSH    {r0}              @ save current n on stack (we'll need it after the recursive call)</a:t>
             </a:r>
           </a:p>
           <a:p>
@@ -30825,7 +30853,7 @@
             </a:pPr>
             <a:r>
               <a:rPr lang="en-US" dirty="0"/>
-              <a:t>    SUB     r0, r0, #1        % r0 = n - 1 (argument for recursive call)</a:t>
+              <a:t>    SUB     r0, r0, #1        @ r0 = n - 1 (argument for recursive call)</a:t>
             </a:r>
           </a:p>
           <a:p>
@@ -30834,7 +30862,7 @@
             </a:pPr>
             <a:r>
               <a:rPr lang="en-US" dirty="0"/>
-              <a:t>    BL      factorial         % r0 = factorial(n - 1)</a:t>
+              <a:t>    BL      factorial         @ r0 = factorial(n - 1)</a:t>
             </a:r>
           </a:p>
           <a:p>
@@ -30849,7 +30877,7 @@
             </a:pPr>
             <a:r>
               <a:rPr lang="en-US" dirty="0"/>
-              <a:t>    POP     {r1}              % r1 = saved n (restore caller's n)</a:t>
+              <a:t>    POP     {r1}              @ r1 = saved n (restore caller's n)</a:t>
             </a:r>
           </a:p>
           <a:p>
@@ -30858,7 +30886,7 @@
             </a:pPr>
             <a:r>
               <a:rPr lang="en-US" dirty="0"/>
-              <a:t>    MUL     r0, r0, r1        % r0 = factorial(n - 1) * n</a:t>
+              <a:t>    MUL     r0, r0, r1        @ r0 = factorial(n - 1) * n</a:t>
             </a:r>
           </a:p>
           <a:p>
@@ -30881,7 +30909,7 @@
             </a:r>
             <a:r>
               <a:rPr lang="en-US" dirty="0"/>
-              <a:t>}              % restore return address</a:t>
+              <a:t>}              @ restore return address</a:t>
             </a:r>
           </a:p>
           <a:p>
@@ -30898,7 +30926,7 @@
             </a:r>
             <a:r>
               <a:rPr lang="en-US" dirty="0"/>
-              <a:t>                % return with result in r0</a:t>
+              <a:t>                @ return with result in r0</a:t>
             </a:r>
           </a:p>
           <a:p>
@@ -30926,7 +30954,7 @@
             </a:pPr>
             <a:r>
               <a:rPr lang="en-US" dirty="0"/>
-              <a:t>    % TODO</a:t>
+              <a:t>    @ TODO</a:t>
             </a:r>
           </a:p>
         </p:txBody>
@@ -31063,7 +31091,7 @@
             </a:pPr>
             <a:r>
               <a:rPr lang="en-US" dirty="0"/>
-              <a:t> % uint32_t </a:t>
+              <a:t> @ uint32_t </a:t>
             </a:r>
             <a:r>
               <a:rPr lang="en-US" dirty="0" err="1"/>
@@ -31080,7 +31108,7 @@
             </a:pPr>
             <a:r>
               <a:rPr lang="en-US" dirty="0"/>
-              <a:t> % r0 = n, returns r0 = n!</a:t>
+              <a:t> @ r0 = n, returns r0 = n!</a:t>
             </a:r>
           </a:p>
           <a:p>
@@ -31124,7 +31152,7 @@
             </a:r>
             <a:r>
               <a:rPr lang="en-US" dirty="0"/>
-              <a:t>}          % save callee-saved we’ll use and return </a:t>
+              <a:t>}          @ save callee-saved we’ll use and return </a:t>
             </a:r>
             <a:r>
               <a:rPr lang="en-US" dirty="0" err="1"/>
@@ -31138,7 +31166,7 @@
             </a:pPr>
             <a:r>
               <a:rPr lang="en-US" dirty="0"/>
-              <a:t>    MOV    r1, r0          % r1 = n (loop counter)</a:t>
+              <a:t>    MOV    r1, r0          @ r1 = n (loop counter)</a:t>
             </a:r>
           </a:p>
           <a:p>
@@ -31147,7 +31175,7 @@
             </a:pPr>
             <a:r>
               <a:rPr lang="en-US" dirty="0"/>
-              <a:t>    MOV    r0, #1         % r0 = acc = 1</a:t>
+              <a:t>    MOV    r0, #1         @ r0 = acc = 1</a:t>
             </a:r>
           </a:p>
           <a:p>
@@ -31173,7 +31201,7 @@
             </a:r>
             <a:r>
               <a:rPr lang="en-US" dirty="0"/>
-              <a:t>       % if n &lt;= 1, return 1</a:t>
+              <a:t>       @ if n &lt;= 1, return 1</a:t>
             </a:r>
           </a:p>
           <a:p>
@@ -31182,7 +31210,7 @@
             </a:pPr>
             <a:r>
               <a:rPr lang="en-US" dirty="0"/>
-              <a:t>                                      % (unsigned compare)</a:t>
+              <a:t>                                      @ (unsigned compare)</a:t>
             </a:r>
           </a:p>
           <a:p>
@@ -31208,7 +31236,7 @@
             </a:pPr>
             <a:r>
               <a:rPr lang="en-US" dirty="0"/>
-              <a:t>    MUL     r0, r0, r1        % acc *= </a:t>
+              <a:t>    MUL     r0, r0, r1        @ acc *= </a:t>
             </a:r>
             <a:r>
               <a:rPr lang="en-US" dirty="0" err="1"/>
@@ -31222,7 +31250,7 @@
             </a:pPr>
             <a:r>
               <a:rPr lang="en-US" dirty="0"/>
-              <a:t>    SUBS    r1, r1, #1        % </a:t>
+              <a:t>    SUBS    r1, r1, #1        @ </a:t>
             </a:r>
             <a:r>
               <a:rPr lang="en-US" dirty="0" err="1"/>
@@ -31247,7 +31275,7 @@
             </a:r>
             <a:r>
               <a:rPr lang="en-US" dirty="0"/>
-              <a:t>       % continue while </a:t>
+              <a:t>       @ continue while </a:t>
             </a:r>
             <a:r>
               <a:rPr lang="en-US" dirty="0" err="1"/>
@@ -31264,7 +31292,7 @@
             </a:pPr>
             <a:r>
               <a:rPr lang="en-US" dirty="0"/>
-              <a:t>                                      % (unsigned compare)</a:t>
+              <a:t>                                      @ (unsigned compare)</a:t>
             </a:r>
           </a:p>
           <a:p>
@@ -31538,7 +31566,7 @@
             </a:pPr>
             <a:r>
               <a:rPr lang="en-US" dirty="0"/>
-              <a:t> % uint32_t factorial(uint32_t n); Recursive version</a:t>
+              <a:t> @ uint32_t factorial(uint32_t n); Recursive version</a:t>
             </a:r>
           </a:p>
           <a:p>
@@ -31547,7 +31575,7 @@
             </a:pPr>
             <a:r>
               <a:rPr lang="en-US" dirty="0"/>
-              <a:t>    % r0: n</a:t>
+              <a:t>    @ r0: n</a:t>
             </a:r>
           </a:p>
           <a:p>
@@ -31556,7 +31584,7 @@
             </a:pPr>
             <a:r>
               <a:rPr lang="en-US" dirty="0"/>
-              <a:t>    % returns r0: n!</a:t>
+              <a:t>    @ returns r0: n!</a:t>
             </a:r>
           </a:p>
           <a:p>
@@ -31580,7 +31608,7 @@
             </a:pPr>
             <a:r>
               <a:rPr lang="en-US" dirty="0"/>
-              <a:t>    CMP     r0, #1            % if (n &lt;= 1) ...</a:t>
+              <a:t>    CMP     r0, #1            @ if (n &lt;= 1) ...</a:t>
             </a:r>
           </a:p>
           <a:p>
@@ -31605,7 +31633,7 @@
             </a:r>
             <a:r>
               <a:rPr lang="en-US" dirty="0"/>
-              <a:t>         %    ... return 1</a:t>
+              <a:t>         @    ... return 1</a:t>
             </a:r>
           </a:p>
           <a:p>
@@ -31628,7 +31656,7 @@
             </a:r>
             <a:r>
               <a:rPr lang="en-US" dirty="0"/>
-              <a:t>}              % save return address for this frame</a:t>
+              <a:t>}              @ save return address for this frame</a:t>
             </a:r>
           </a:p>
           <a:p>
@@ -31637,7 +31665,7 @@
             </a:pPr>
             <a:r>
               <a:rPr lang="en-US" dirty="0"/>
-              <a:t>    PUSH    {r0}             % save current n on stack (we'll need it after the recursive call)</a:t>
+              <a:t>    PUSH    {r0}             @ save current n on stack (we'll need it after the recursive call)</a:t>
             </a:r>
           </a:p>
           <a:p>
@@ -31652,7 +31680,7 @@
             </a:pPr>
             <a:r>
               <a:rPr lang="en-US" dirty="0"/>
-              <a:t>    SUB     r0, r0, #1        % r0 = n - 1 (argument for recursive call)</a:t>
+              <a:t>    SUB     r0, r0, #1        @ r0 = n - 1 (argument for recursive call)</a:t>
             </a:r>
           </a:p>
           <a:p>
@@ -31661,7 +31689,7 @@
             </a:pPr>
             <a:r>
               <a:rPr lang="en-US" dirty="0"/>
-              <a:t>    BL      factorial          % r0 = factorial(n - 1)</a:t>
+              <a:t>    BL      factorial          @ r0 = factorial(n - 1)</a:t>
             </a:r>
           </a:p>
           <a:p>
@@ -31676,7 +31704,7 @@
             </a:pPr>
             <a:r>
               <a:rPr lang="en-US" dirty="0"/>
-              <a:t>    POP     {r1}               % r1 = saved n (restore caller's n)</a:t>
+              <a:t>    POP     {r1}               @ r1 = saved n (restore caller's n)</a:t>
             </a:r>
           </a:p>
           <a:p>
@@ -31685,7 +31713,7 @@
             </a:pPr>
             <a:r>
               <a:rPr lang="en-US" dirty="0"/>
-              <a:t>    MUL     r0, r0, r1        % r0 = factorial(n - 1) * n</a:t>
+              <a:t>    MUL     r0, r0, r1        @ r0 = factorial(n - 1) * n</a:t>
             </a:r>
           </a:p>
           <a:p>
@@ -31708,7 +31736,7 @@
             </a:r>
             <a:r>
               <a:rPr lang="en-US" dirty="0"/>
-              <a:t>}              % restore return address</a:t>
+              <a:t>}              @ restore return address</a:t>
             </a:r>
           </a:p>
           <a:p>
@@ -31725,7 +31753,7 @@
             </a:r>
             <a:r>
               <a:rPr lang="en-US" dirty="0"/>
-              <a:t>                 % return with result in r0</a:t>
+              <a:t>                 @ return with result in r0</a:t>
             </a:r>
           </a:p>
           <a:p>
@@ -31753,7 +31781,7 @@
             </a:pPr>
             <a:r>
               <a:rPr lang="en-US" dirty="0"/>
-              <a:t>    MOV     r0, #1            % factorial(n) = 1 for n &lt;= 1</a:t>
+              <a:t>    MOV     r0, #1            @ factorial(n) = 1 for n &lt;= 1</a:t>
             </a:r>
           </a:p>
           <a:p>
@@ -31770,7 +31798,7 @@
             </a:r>
             <a:r>
               <a:rPr lang="en-US" dirty="0"/>
-              <a:t>                % return</a:t>
+              <a:t>                @ return</a:t>
             </a:r>
           </a:p>
         </p:txBody>
@@ -39645,7 +39673,7 @@
                 <a:latin typeface="Consolas" panose="020B0609020204030204" pitchFamily="49" charset="0"/>
                 <a:cs typeface="Consolas" panose="020B0609020204030204" pitchFamily="49" charset="0"/>
               </a:rPr>
-              <a:t>0x20000200</a:t>
+              <a:t>0x200001F8</a:t>
             </a:r>
           </a:p>
         </p:txBody>
